--- a/public/fun/pack/pptx/familypro/가족소개프리미엄_19_나혼자·1인가구_레몬크림.pptx
+++ b/public/fun/pack/pptx/familypro/가족소개프리미엄_19_나혼자·1인가구_레몬크림.pptx
@@ -113,12 +113,12 @@
   <p:extLst>
     <p:ext uri="{521415D9-36F7-43E2-AB2F-B90AF26B5E84}">
       <p14:sectionLst xmlns:p14="http://schemas.microsoft.com/office/powerpoint/2010/main">
-        <p14:section name="시작" id="{3589924A-5C77-449D-9BC3-1E3183CCA74F}">
+        <p14:section name="시작" id="{65943A3A-DFF5-4EAC-A854-C325D4BE38B5}">
           <p14:sldIdLst>
             <p14:sldId id="256"/>
           </p14:sldIdLst>
         </p14:section>
-        <p14:section name="본문" id="{2DF16522-DBD6-4DA2-9C32-F49389A088C0}">
+        <p14:section name="본문" id="{DE909D0F-EB1A-45B6-B484-93DA1A118F6D}">
           <p14:sldIdLst>
             <p14:sldId id="257"/>
             <p14:sldId id="258"/>
@@ -127,7 +127,7 @@
             <p14:sldId id="261"/>
           </p14:sldIdLst>
         </p14:section>
-        <p14:section name="마무리" id="{A2F1C548-FCE0-462C-AD0D-03CFA2B8F2E7}">
+        <p14:section name="마무리" id="{BAC0A5C5-1287-42FA-9F1B-D5868C4D1FDB}">
           <p14:sldIdLst>
             <p14:sldId id="262"/>
           </p14:sldIdLst>
@@ -2901,7 +2901,7 @@
             </a:lvl1pPr>
           </a:lstStyle>
           <a:p>
-            <a:fld id="{97F9E815-798A-4C6B-8086-9D85427D6308}" type="slidenum">
+            <a:fld id="{90CCE53C-24BD-4267-8AC9-133A9EA8F014}" type="slidenum">
               <a:rPr lang="en-US"/>
               <a:t>‹#›</a:t>
             </a:fld>
@@ -4937,7 +4937,7 @@
             </a:lvl1pPr>
           </a:lstStyle>
           <a:p>
-            <a:fld id="{88EED92E-1AD1-4377-948D-4609C02F9A52}" type="slidenum">
+            <a:fld id="{2CFF5F41-815F-4675-B3CF-79376EB1F5FD}" type="slidenum">
               <a:rPr lang="en-US"/>
               <a:t>‹#›</a:t>
             </a:fld>
@@ -5618,7 +5618,7 @@
             </a:lvl1pPr>
           </a:lstStyle>
           <a:p>
-            <a:fld id="{36D67365-DFB5-4C81-96F0-5002DA976217}" type="slidenum">
+            <a:fld id="{6D7DF0E0-701E-46C2-A218-A4CA9452ECE9}" type="slidenum">
               <a:rPr lang="en-US"/>
               <a:t>‹#›</a:t>
             </a:fld>
@@ -6481,7 +6481,7 @@
           <a:p>
             <a:r>
               <a:rPr lang="ko-KR"/>
-              <a:t>나 혼자 · 1인 가구 · 0000. 00. 00</a:t>
+              <a:t>나 혼자 · 1인 가구 · 날짜 입력</a:t>
             </a:r>
           </a:p>
         </p:txBody>
@@ -6791,7 +6791,7 @@
           <a:bodyPr/>
           <a:lstStyle/>
           <a:p>
-            <a:fld id="{9F504FD4-B0C6-4BDB-A6B4-939C0BD2B9D6}" type="slidenum">
+            <a:fld id="{BBDDC396-5C72-475D-BB23-2B7899045718}" type="slidenum">
               <a:rPr lang="en-US"/>
               <a:t>‹#›</a:t>
             </a:fld>
@@ -7413,7 +7413,7 @@
           <a:bodyPr/>
           <a:lstStyle/>
           <a:p>
-            <a:fld id="{61D181A4-9781-4D89-9EBB-431FB8D83413}" type="slidenum">
+            <a:fld id="{62625A87-5245-4164-9E5A-F978EE8628DD}" type="slidenum">
               <a:rPr lang="en-US"/>
               <a:t>‹#›</a:t>
             </a:fld>
@@ -8255,7 +8255,7 @@
           <a:bodyPr/>
           <a:lstStyle/>
           <a:p>
-            <a:fld id="{965938AE-69C2-4CAE-9022-F97B4B8C14E4}" type="slidenum">
+            <a:fld id="{EC81B6A8-9556-42C3-BB6B-E790C5FC2A24}" type="slidenum">
               <a:rPr lang="en-US"/>
               <a:t>‹#›</a:t>
             </a:fld>
@@ -9558,7 +9558,7 @@
           <a:bodyPr/>
           <a:lstStyle/>
           <a:p>
-            <a:fld id="{89C7DE2D-20EE-43C6-8317-99CFAF383B5F}" type="slidenum">
+            <a:fld id="{BB6B4649-B1E0-4C4B-AE0E-D10FD39B622B}" type="slidenum">
               <a:rPr lang="en-US"/>
               <a:t>‹#›</a:t>
             </a:fld>
@@ -9646,7 +9646,7 @@
           <a:bodyPr/>
           <a:lstStyle/>
           <a:p>
-            <a:fld id="{173D2A22-75D1-4341-833A-778D985A45F9}" type="slidenum">
+            <a:fld id="{4B479C99-52EE-469D-BE15-D790C56223AB}" type="slidenum">
               <a:rPr lang="en-US"/>
               <a:t>‹#›</a:t>
             </a:fld>
